--- a/inbox/Application Aware Networking/Vol_IX_Book_05_FedAAN_SaaS_Integration_Governance.pptx
+++ b/inbox/Application Aware Networking/Vol_IX_Book_05_FedAAN_SaaS_Integration_Governance.pptx
@@ -1416,7 +1416,7 @@
           <a:lstStyle/>
           <a:p>
             <a:r>
-              <a:t>The signing certificate and the SCIM token are authenticators with lifecycles, not setup steps — the rule Lane E applies to app registrations, applied here to the federation trust. This phase has the strongest operational ally: an expiring signing certificate is the single most common cause of a federation outage, so automated rotation sells itself to the people who carry the pager. Certificate-based where the SaaS supports it; a secret with a mandatory expiry where it does not; never a long-lived secret in config.</a:t>
+              <a:t>The signing certificate and the SCIM token are authenticators with lifecycles, not setup steps — the rule Lane E applies to app registrations, applied here to the federation trust. This phase has the strongest operational ally: an expiring signing certificate is the single most common cause of a federation outage, so scheduled rotation sells itself to the people who carry the pager. Certificate-based where the SaaS supports it; a secret with a mandatory expiry where it does not; never a long-lived secret in config.</a:t>
             </a:r>
           </a:p>
         </p:txBody>
@@ -5327,7 +5327,7 @@
                 </a:solidFill>
                 <a:latin typeface="Arial"/>
               </a:rPr>
-              <a:t>Date Code: 2026-07-14 11:56 ET</a:t>
+              <a:t>Date Code: 2026-07-16 09:48 ET</a:t>
             </a:r>
           </a:p>
         </p:txBody>
@@ -5515,7 +5515,7 @@
                 </a:solidFill>
                 <a:latin typeface="Arial"/>
               </a:rPr>
-              <a:t>SaaS Integration Governance · Date Code: 2026-07-14 11:56 ET</a:t>
+              <a:t>SaaS Integration Governance · Date Code: 2026-07-16 09:48 ET</a:t>
             </a:r>
           </a:p>
         </p:txBody>
@@ -6961,7 +6961,7 @@
                 </a:solidFill>
                 <a:latin typeface="Arial"/>
               </a:rPr>
-              <a:t>SaaS Integration Governance · Date Code: 2026-07-14 11:56 ET</a:t>
+              <a:t>SaaS Integration Governance · Date Code: 2026-07-16 09:48 ET</a:t>
             </a:r>
           </a:p>
         </p:txBody>
@@ -8407,7 +8407,7 @@
                 </a:solidFill>
                 <a:latin typeface="Arial"/>
               </a:rPr>
-              <a:t>SaaS Integration Governance · Date Code: 2026-07-14 11:56 ET</a:t>
+              <a:t>SaaS Integration Governance · Date Code: 2026-07-16 09:48 ET</a:t>
             </a:r>
           </a:p>
         </p:txBody>
@@ -9314,7 +9314,7 @@
                 </a:solidFill>
                 <a:latin typeface="Arial"/>
               </a:rPr>
-              <a:t>SaaS Integration Governance · Date Code: 2026-07-14 11:56 ET</a:t>
+              <a:t>SaaS Integration Governance · Date Code: 2026-07-16 09:48 ET</a:t>
             </a:r>
           </a:p>
         </p:txBody>
@@ -10221,7 +10221,7 @@
                 </a:solidFill>
                 <a:latin typeface="Arial"/>
               </a:rPr>
-              <a:t>SaaS Integration Governance · Date Code: 2026-07-14 11:56 ET</a:t>
+              <a:t>SaaS Integration Governance · Date Code: 2026-07-16 09:48 ET</a:t>
             </a:r>
           </a:p>
         </p:txBody>
@@ -11128,7 +11128,7 @@
                 </a:solidFill>
                 <a:latin typeface="Arial"/>
               </a:rPr>
-              <a:t>SaaS Integration Governance · Date Code: 2026-07-14 11:56 ET</a:t>
+              <a:t>SaaS Integration Governance · Date Code: 2026-07-16 09:48 ET</a:t>
             </a:r>
           </a:p>
         </p:txBody>
@@ -12035,7 +12035,7 @@
                 </a:solidFill>
                 <a:latin typeface="Arial"/>
               </a:rPr>
-              <a:t>SaaS Integration Governance · Date Code: 2026-07-14 11:56 ET</a:t>
+              <a:t>SaaS Integration Governance · Date Code: 2026-07-16 09:48 ET</a:t>
             </a:r>
           </a:p>
         </p:txBody>
@@ -12258,7 +12258,7 @@
                 </a:solidFill>
                 <a:latin typeface="Arial"/>
               </a:rPr>
-              <a:t>SaaS Integration Governance · Date Code: 2026-07-14 11:56 ET</a:t>
+              <a:t>SaaS Integration Governance · Date Code: 2026-07-16 09:48 ET</a:t>
             </a:r>
           </a:p>
         </p:txBody>
@@ -13165,7 +13165,7 @@
                 </a:solidFill>
                 <a:latin typeface="Arial"/>
               </a:rPr>
-              <a:t>SaaS Integration Governance · Date Code: 2026-07-14 11:56 ET</a:t>
+              <a:t>SaaS Integration Governance · Date Code: 2026-07-16 09:48 ET</a:t>
             </a:r>
           </a:p>
         </p:txBody>
@@ -14072,7 +14072,7 @@
                 </a:solidFill>
                 <a:latin typeface="Arial"/>
               </a:rPr>
-              <a:t>SaaS Integration Governance · Date Code: 2026-07-14 11:56 ET</a:t>
+              <a:t>SaaS Integration Governance · Date Code: 2026-07-16 09:48 ET</a:t>
             </a:r>
           </a:p>
         </p:txBody>
@@ -15518,7 +15518,7 @@
                 </a:solidFill>
                 <a:latin typeface="Arial"/>
               </a:rPr>
-              <a:t>SaaS Integration Governance · Date Code: 2026-07-14 11:56 ET</a:t>
+              <a:t>SaaS Integration Governance · Date Code: 2026-07-16 09:48 ET</a:t>
             </a:r>
           </a:p>
         </p:txBody>
@@ -16964,7 +16964,7 @@
                 </a:solidFill>
                 <a:latin typeface="Arial"/>
               </a:rPr>
-              <a:t>SaaS Integration Governance · Date Code: 2026-07-14 11:56 ET</a:t>
+              <a:t>SaaS Integration Governance · Date Code: 2026-07-16 09:48 ET</a:t>
             </a:r>
           </a:p>
         </p:txBody>
@@ -18279,7 +18279,7 @@
                 </a:solidFill>
                 <a:latin typeface="Arial"/>
               </a:rPr>
-              <a:t>Credentials — three items. The SAML signing certificate and SCIM bearer token issued short-lived, rotated automatically, governed under the agency certificate policy. IA-5(2), IA-5, SC-17.</a:t>
+              <a:t>Credentials — three items. The SAML signing certificate and SCIM bearer token issued short-lived, rotated on a schedule with owner approval, governed under the agency certificate policy. IA-5(2), IA-5, SC-17.</a:t>
             </a:r>
           </a:p>
         </p:txBody>
@@ -18410,7 +18410,7 @@
                 </a:solidFill>
                 <a:latin typeface="Arial"/>
               </a:rPr>
-              <a:t>SaaS Integration Governance · Date Code: 2026-07-14 11:56 ET</a:t>
+              <a:t>SaaS Integration Governance · Date Code: 2026-07-16 09:48 ET</a:t>
             </a:r>
           </a:p>
         </p:txBody>
@@ -19856,7 +19856,7 @@
                 </a:solidFill>
                 <a:latin typeface="Arial"/>
               </a:rPr>
-              <a:t>SaaS Integration Governance · Date Code: 2026-07-14 11:56 ET</a:t>
+              <a:t>SaaS Integration Governance · Date Code: 2026-07-16 09:48 ET</a:t>
             </a:r>
           </a:p>
         </p:txBody>
